--- a/Slides/5_Data_Modeling_Database_Design.pptx
+++ b/Slides/5_Data_Modeling_Database_Design.pptx
@@ -5,7 +5,7 @@
     <p:sldMasterId id="2147483648" r:id="rId1"/>
   </p:sldMasterIdLst>
   <p:notesMasterIdLst>
-    <p:notesMasterId r:id="rId26"/>
+    <p:notesMasterId r:id="rId25"/>
   </p:notesMasterIdLst>
   <p:sldIdLst>
     <p:sldId id="256" r:id="rId2"/>
@@ -31,7 +31,6 @@
     <p:sldId id="276" r:id="rId22"/>
     <p:sldId id="277" r:id="rId23"/>
     <p:sldId id="278" r:id="rId24"/>
-    <p:sldId id="279" r:id="rId25"/>
   </p:sldIdLst>
   <p:sldSz cx="9144000" cy="5143500" type="screen16x9"/>
   <p:notesSz cx="5143500" cy="9144000"/>
@@ -1586,90 +1585,6 @@
             <a:fld id="{F7021451-1387-4CA6-816F-3879F97B5CBC}" type="slidenum">
               <a:rPr lang="en-US"/>
               <a:t>23</a:t>
-            </a:fld>
-            <a:endParaRPr lang="en-US"/>
-          </a:p>
-        </p:txBody>
-      </p:sp>
-    </p:spTree>
-    <p:extLst>
-      <p:ext uri="{BB962C8B-B14F-4D97-AF65-F5344CB8AC3E}">
-        <p14:creationId xmlns:p14="http://schemas.microsoft.com/office/powerpoint/2010/main" val="1024086991"/>
-      </p:ext>
-    </p:extLst>
-  </p:cSld>
-  <p:clrMapOvr>
-    <a:masterClrMapping/>
-  </p:clrMapOvr>
-</p:notes>
-</file>
-
-<file path=ppt/notesSlides/notesSlide24.xml><?xml version="1.0" encoding="utf-8"?>
-<p:notes xmlns:a="http://schemas.openxmlformats.org/drawingml/2006/main" xmlns:r="http://schemas.openxmlformats.org/officeDocument/2006/relationships" xmlns:p="http://schemas.openxmlformats.org/presentationml/2006/main">
-  <p:cSld>
-    <p:spTree>
-      <p:nvGrpSpPr>
-        <p:cNvPr id="1" name=""/>
-        <p:cNvGrpSpPr/>
-        <p:nvPr/>
-      </p:nvGrpSpPr>
-      <p:grpSpPr>
-        <a:xfrm>
-          <a:off x="0" y="0"/>
-          <a:ext cx="0" cy="0"/>
-          <a:chOff x="0" y="0"/>
-          <a:chExt cx="0" cy="0"/>
-        </a:xfrm>
-      </p:grpSpPr>
-      <p:sp>
-        <p:nvSpPr>
-          <p:cNvPr id="2" name="Slide Image Placeholder 1"/>
-          <p:cNvSpPr>
-            <a:spLocks noGrp="1" noRot="1" noChangeAspect="1"/>
-          </p:cNvSpPr>
-          <p:nvPr>
-            <p:ph type="sldImg"/>
-          </p:nvPr>
-        </p:nvSpPr>
-        <p:spPr/>
-      </p:sp>
-      <p:sp>
-        <p:nvSpPr>
-          <p:cNvPr id="3" name="Notes Placeholder 2"/>
-          <p:cNvSpPr>
-            <a:spLocks noGrp="1"/>
-          </p:cNvSpPr>
-          <p:nvPr>
-            <p:ph type="body" idx="1"/>
-          </p:nvPr>
-        </p:nvSpPr>
-        <p:spPr/>
-        <p:txBody>
-          <a:bodyPr/>
-          <a:lstStyle/>
-          <a:p>
-            <a:endParaRPr lang="en-US" dirty="0"/>
-          </a:p>
-        </p:txBody>
-      </p:sp>
-      <p:sp>
-        <p:nvSpPr>
-          <p:cNvPr id="4" name="Slide Number Placeholder 3"/>
-          <p:cNvSpPr>
-            <a:spLocks noGrp="1"/>
-          </p:cNvSpPr>
-          <p:nvPr>
-            <p:ph type="sldNum" sz="quarter" idx="10"/>
-          </p:nvPr>
-        </p:nvSpPr>
-        <p:spPr/>
-        <p:txBody>
-          <a:bodyPr/>
-          <a:lstStyle/>
-          <a:p>
-            <a:fld id="{F7021451-1387-4CA6-816F-3879F97B5CBC}" type="slidenum">
-              <a:rPr lang="en-US"/>
-              <a:t>24</a:t>
             </a:fld>
             <a:endParaRPr lang="en-US"/>
           </a:p>
@@ -7024,7 +6939,7 @@
         </p:nvGraphicFramePr>
         <p:xfrm>
           <a:off x="457200" y="1371600"/>
-          <a:ext cx="8229600" cy="2560320"/>
+          <a:ext cx="8229600" cy="2621280"/>
         </p:xfrm>
         <a:graphic>
           <a:graphicData uri="http://schemas.openxmlformats.org/drawingml/2006/table">
@@ -8618,8 +8533,8 @@
         </p:nvSpPr>
         <p:spPr>
           <a:xfrm>
-            <a:off x="457200" y="365760"/>
-            <a:ext cx="8229600" cy="548640"/>
+            <a:off x="54142" y="-46923"/>
+            <a:ext cx="2791326" cy="548640"/>
           </a:xfrm>
           <a:prstGeom prst="rect">
             <a:avLst/>
@@ -8657,8 +8572,8 @@
         </p:nvSpPr>
         <p:spPr>
           <a:xfrm>
-            <a:off x="457200" y="914400"/>
-            <a:ext cx="8229600" cy="320040"/>
+            <a:off x="210553" y="525780"/>
+            <a:ext cx="3916279" cy="320040"/>
           </a:xfrm>
           <a:prstGeom prst="rect">
             <a:avLst/>
@@ -8682,7 +8597,23 @@
                 <a:ea typeface="Calibri" pitchFamily="34" charset="-122"/>
                 <a:cs typeface="Calibri" pitchFamily="34" charset="-120"/>
               </a:rPr>
-              <a:t>The most common data warehouse design pattern</a:t>
+              <a:t>The most common data warehouse design</a:t>
+            </a:r>
+          </a:p>
+          <a:p>
+            <a:pPr marL="0" indent="0">
+              <a:buNone/>
+            </a:pPr>
+            <a:r>
+              <a:rPr lang="en-US" sz="1400" dirty="0">
+                <a:solidFill>
+                  <a:srgbClr val="64748B"/>
+                </a:solidFill>
+                <a:latin typeface="Calibri" pitchFamily="34" charset="0"/>
+                <a:ea typeface="Calibri" pitchFamily="34" charset="-122"/>
+                <a:cs typeface="Calibri" pitchFamily="34" charset="-120"/>
+              </a:rPr>
+              <a:t>pattern</a:t>
             </a:r>
             <a:endParaRPr lang="en-US" sz="1400" dirty="0"/>
           </a:p>
@@ -22295,7 +22226,7 @@
         </p:nvSpPr>
         <p:spPr>
           <a:xfrm>
-            <a:off x="457200" y="274320"/>
+            <a:off x="274320" y="274320"/>
             <a:ext cx="2926080" cy="457200"/>
           </a:xfrm>
           <a:prstGeom prst="rect">
@@ -24709,156 +24640,6 @@
               <a:t>Use surrogate keys and create a comprehensive date dimension</a:t>
             </a:r>
             <a:endParaRPr lang="en-US" sz="1300" dirty="0"/>
-          </a:p>
-        </p:txBody>
-      </p:sp>
-    </p:spTree>
-  </p:cSld>
-  <p:clrMapOvr>
-    <a:masterClrMapping/>
-  </p:clrMapOvr>
-</p:sld>
-</file>
-
-<file path=ppt/slides/slide24.xml><?xml version="1.0" encoding="utf-8"?>
-<p:sld xmlns:a="http://schemas.openxmlformats.org/drawingml/2006/main" xmlns:r="http://schemas.openxmlformats.org/officeDocument/2006/relationships" xmlns:p="http://schemas.openxmlformats.org/presentationml/2006/main">
-  <p:cSld name="Slide 24">
-    <p:bg>
-      <p:bgPr>
-        <a:solidFill>
-          <a:srgbClr val="1E293B"/>
-        </a:solidFill>
-        <a:effectLst/>
-      </p:bgPr>
-    </p:bg>
-    <p:spTree>
-      <p:nvGrpSpPr>
-        <p:cNvPr id="1" name=""/>
-        <p:cNvGrpSpPr/>
-        <p:nvPr/>
-      </p:nvGrpSpPr>
-      <p:grpSpPr>
-        <a:xfrm>
-          <a:off x="0" y="0"/>
-          <a:ext cx="0" cy="0"/>
-          <a:chOff x="0" y="0"/>
-          <a:chExt cx="0" cy="0"/>
-        </a:xfrm>
-      </p:grpSpPr>
-      <p:sp>
-        <p:nvSpPr>
-          <p:cNvPr id="2" name="Text 0"/>
-          <p:cNvSpPr/>
-          <p:nvPr/>
-        </p:nvSpPr>
-        <p:spPr>
-          <a:xfrm>
-            <a:off x="457200" y="1828800"/>
-            <a:ext cx="8229600" cy="822960"/>
-          </a:xfrm>
-          <a:prstGeom prst="rect">
-            <a:avLst/>
-          </a:prstGeom>
-          <a:noFill/>
-          <a:ln/>
-        </p:spPr>
-        <p:txBody>
-          <a:bodyPr wrap="square" rtlCol="0" anchor="ctr"/>
-          <a:lstStyle/>
-          <a:p>
-            <a:pPr marL="0" indent="0" algn="ctr">
-              <a:buNone/>
-            </a:pPr>
-            <a:r>
-              <a:rPr lang="en-US" sz="4800" b="1" dirty="0">
-                <a:solidFill>
-                  <a:srgbClr val="FFFFFF"/>
-                </a:solidFill>
-                <a:latin typeface="Calibri" pitchFamily="34" charset="0"/>
-                <a:ea typeface="Calibri" pitchFamily="34" charset="-122"/>
-                <a:cs typeface="Calibri" pitchFamily="34" charset="-120"/>
-              </a:rPr>
-              <a:t>Questions?</a:t>
-            </a:r>
-            <a:endParaRPr lang="en-US" sz="4800" dirty="0"/>
-          </a:p>
-        </p:txBody>
-      </p:sp>
-      <p:sp>
-        <p:nvSpPr>
-          <p:cNvPr id="3" name="Text 1"/>
-          <p:cNvSpPr/>
-          <p:nvPr/>
-        </p:nvSpPr>
-        <p:spPr>
-          <a:xfrm>
-            <a:off x="457200" y="2743200"/>
-            <a:ext cx="8229600" cy="457200"/>
-          </a:xfrm>
-          <a:prstGeom prst="rect">
-            <a:avLst/>
-          </a:prstGeom>
-          <a:noFill/>
-          <a:ln/>
-        </p:spPr>
-        <p:txBody>
-          <a:bodyPr wrap="square" rtlCol="0" anchor="ctr"/>
-          <a:lstStyle/>
-          <a:p>
-            <a:pPr marL="0" indent="0" algn="ctr">
-              <a:buNone/>
-            </a:pPr>
-            <a:r>
-              <a:rPr lang="en-US" sz="1600" dirty="0">
-                <a:solidFill>
-                  <a:srgbClr val="64748B"/>
-                </a:solidFill>
-                <a:latin typeface="Calibri" pitchFamily="34" charset="0"/>
-                <a:ea typeface="Calibri" pitchFamily="34" charset="-122"/>
-                <a:cs typeface="Calibri" pitchFamily="34" charset="-120"/>
-              </a:rPr>
-              <a:t>A good data model is the foundation of good analytics!</a:t>
-            </a:r>
-            <a:endParaRPr lang="en-US" sz="1600" dirty="0"/>
-          </a:p>
-        </p:txBody>
-      </p:sp>
-      <p:sp>
-        <p:nvSpPr>
-          <p:cNvPr id="4" name="Text 2"/>
-          <p:cNvSpPr/>
-          <p:nvPr/>
-        </p:nvSpPr>
-        <p:spPr>
-          <a:xfrm>
-            <a:off x="457200" y="3840480"/>
-            <a:ext cx="8229600" cy="457200"/>
-          </a:xfrm>
-          <a:prstGeom prst="rect">
-            <a:avLst/>
-          </a:prstGeom>
-          <a:noFill/>
-          <a:ln/>
-        </p:spPr>
-        <p:txBody>
-          <a:bodyPr wrap="square" rtlCol="0" anchor="ctr"/>
-          <a:lstStyle/>
-          <a:p>
-            <a:pPr marL="0" indent="0" algn="ctr">
-              <a:buNone/>
-            </a:pPr>
-            <a:r>
-              <a:rPr lang="en-US" sz="1600" dirty="0">
-                <a:solidFill>
-                  <a:srgbClr val="14B8A6"/>
-                </a:solidFill>
-                <a:latin typeface="Calibri" pitchFamily="34" charset="0"/>
-                <a:ea typeface="Calibri" pitchFamily="34" charset="-122"/>
-                <a:cs typeface="Calibri" pitchFamily="34" charset="-120"/>
-              </a:rPr>
-              <a:t>Next: Data Visualization with Power BI</a:t>
-            </a:r>
-            <a:endParaRPr lang="en-US" sz="1600" dirty="0"/>
           </a:p>
         </p:txBody>
       </p:sp>
@@ -34909,7 +34690,51 @@
                 <a:ea typeface="Calibri" pitchFamily="34" charset="-122"/>
                 <a:cs typeface="Calibri" pitchFamily="34" charset="-120"/>
               </a:rPr>
-              <a:t>product_name depends only on product_id, not the full key! (key can be single key or composite key)</a:t>
+              <a:t>product_name depends only on product_id, not the full key(</a:t>
+            </a:r>
+            <a:r>
+              <a:rPr lang="en-US" sz="1000" dirty="0" err="1">
+                <a:solidFill>
+                  <a:srgbClr val="F97316"/>
+                </a:solidFill>
+                <a:latin typeface="Calibri" pitchFamily="34" charset="0"/>
+                <a:ea typeface="Calibri" pitchFamily="34" charset="-122"/>
+                <a:cs typeface="Calibri" pitchFamily="34" charset="-120"/>
+              </a:rPr>
+              <a:t>order_id</a:t>
+            </a:r>
+            <a:r>
+              <a:rPr lang="en-US" sz="1000" dirty="0">
+                <a:solidFill>
+                  <a:srgbClr val="F97316"/>
+                </a:solidFill>
+                <a:latin typeface="Calibri" pitchFamily="34" charset="0"/>
+                <a:ea typeface="Calibri" pitchFamily="34" charset="-122"/>
+                <a:cs typeface="Calibri" pitchFamily="34" charset="-120"/>
+              </a:rPr>
+              <a:t>, </a:t>
+            </a:r>
+            <a:r>
+              <a:rPr lang="en-US" sz="1000" dirty="0" err="1">
+                <a:solidFill>
+                  <a:srgbClr val="F97316"/>
+                </a:solidFill>
+                <a:latin typeface="Calibri" pitchFamily="34" charset="0"/>
+                <a:ea typeface="Calibri" pitchFamily="34" charset="-122"/>
+                <a:cs typeface="Calibri" pitchFamily="34" charset="-120"/>
+              </a:rPr>
+              <a:t>product_id</a:t>
+            </a:r>
+            <a:r>
+              <a:rPr lang="en-US" sz="1000" dirty="0">
+                <a:solidFill>
+                  <a:srgbClr val="F97316"/>
+                </a:solidFill>
+                <a:latin typeface="Calibri" pitchFamily="34" charset="0"/>
+                <a:ea typeface="Calibri" pitchFamily="34" charset="-122"/>
+                <a:cs typeface="Calibri" pitchFamily="34" charset="-120"/>
+              </a:rPr>
+              <a:t>)! (key can be single key or composite key)</a:t>
             </a:r>
             <a:endParaRPr lang="en-US" sz="1000" dirty="0"/>
           </a:p>
